--- a/EIms project slide-f (1)-w.pptx
+++ b/EIms project slide-f (1)-w.pptx
@@ -5022,6 +5022,46 @@
           </p:txBody>
         </p:sp>
       </p:grpSp>
+      <p:sp>
+        <p:nvSpPr>
+          <p:cNvPr id="43" name="TextBox 42">
+            <a:extLst>
+              <a:ext uri="{FF2B5EF4-FFF2-40B4-BE49-F238E27FC236}">
+                <a16:creationId xmlns:a16="http://schemas.microsoft.com/office/drawing/2014/main" id="{3F865CF7-A71C-4644-8DC4-35858973D9CC}"/>
+              </a:ext>
+            </a:extLst>
+          </p:cNvPr>
+          <p:cNvSpPr txBox="1"/>
+          <p:nvPr/>
+        </p:nvSpPr>
+        <p:spPr>
+          <a:xfrm>
+            <a:off x="11630025" y="153975"/>
+            <a:ext cx="914400" cy="369332"/>
+          </a:xfrm>
+          <a:prstGeom prst="rect">
+            <a:avLst/>
+          </a:prstGeom>
+          <a:solidFill>
+            <a:schemeClr val="tx2">
+              <a:lumMod val="20000"/>
+              <a:lumOff val="80000"/>
+            </a:schemeClr>
+          </a:solidFill>
+        </p:spPr>
+        <p:txBody>
+          <a:bodyPr wrap="square" rtlCol="0">
+            <a:spAutoFit/>
+          </a:bodyPr>
+          <a:lstStyle/>
+          <a:p>
+            <a:r>
+              <a:rPr lang="en-US" dirty="0"/>
+              <a:t>1</a:t>
+            </a:r>
+          </a:p>
+        </p:txBody>
+      </p:sp>
     </p:spTree>
   </p:cSld>
   <p:clrMapOvr>
@@ -6899,6 +6939,46 @@
           </a:p>
         </p:txBody>
       </p:sp>
+      <p:sp>
+        <p:nvSpPr>
+          <p:cNvPr id="46" name="TextBox 45">
+            <a:extLst>
+              <a:ext uri="{FF2B5EF4-FFF2-40B4-BE49-F238E27FC236}">
+                <a16:creationId xmlns:a16="http://schemas.microsoft.com/office/drawing/2014/main" id="{5564A44F-E207-428A-922E-44A68092BDAF}"/>
+              </a:ext>
+            </a:extLst>
+          </p:cNvPr>
+          <p:cNvSpPr txBox="1"/>
+          <p:nvPr/>
+        </p:nvSpPr>
+        <p:spPr>
+          <a:xfrm>
+            <a:off x="11630025" y="153975"/>
+            <a:ext cx="914400" cy="369332"/>
+          </a:xfrm>
+          <a:prstGeom prst="rect">
+            <a:avLst/>
+          </a:prstGeom>
+          <a:solidFill>
+            <a:schemeClr val="tx2">
+              <a:lumMod val="20000"/>
+              <a:lumOff val="80000"/>
+            </a:schemeClr>
+          </a:solidFill>
+        </p:spPr>
+        <p:txBody>
+          <a:bodyPr wrap="square" rtlCol="0">
+            <a:spAutoFit/>
+          </a:bodyPr>
+          <a:lstStyle/>
+          <a:p>
+            <a:r>
+              <a:rPr lang="en-US" dirty="0"/>
+              <a:t>2</a:t>
+            </a:r>
+          </a:p>
+        </p:txBody>
+      </p:sp>
     </p:spTree>
   </p:cSld>
   <p:clrMapOvr>
@@ -9582,6 +9662,46 @@
           </a:prstGeom>
         </p:spPr>
       </p:pic>
+      <p:sp>
+        <p:nvSpPr>
+          <p:cNvPr id="66" name="TextBox 65">
+            <a:extLst>
+              <a:ext uri="{FF2B5EF4-FFF2-40B4-BE49-F238E27FC236}">
+                <a16:creationId xmlns:a16="http://schemas.microsoft.com/office/drawing/2014/main" id="{0233748B-AFBD-4EF5-99A8-57889570DD83}"/>
+              </a:ext>
+            </a:extLst>
+          </p:cNvPr>
+          <p:cNvSpPr txBox="1"/>
+          <p:nvPr/>
+        </p:nvSpPr>
+        <p:spPr>
+          <a:xfrm>
+            <a:off x="11630025" y="153975"/>
+            <a:ext cx="914400" cy="369332"/>
+          </a:xfrm>
+          <a:prstGeom prst="rect">
+            <a:avLst/>
+          </a:prstGeom>
+          <a:solidFill>
+            <a:schemeClr val="tx2">
+              <a:lumMod val="20000"/>
+              <a:lumOff val="80000"/>
+            </a:schemeClr>
+          </a:solidFill>
+        </p:spPr>
+        <p:txBody>
+          <a:bodyPr wrap="square" rtlCol="0">
+            <a:spAutoFit/>
+          </a:bodyPr>
+          <a:lstStyle/>
+          <a:p>
+            <a:r>
+              <a:rPr lang="en-US" dirty="0"/>
+              <a:t>3</a:t>
+            </a:r>
+          </a:p>
+        </p:txBody>
+      </p:sp>
     </p:spTree>
   </p:cSld>
   <p:clrMapOvr>
@@ -11894,6 +12014,46 @@
                 <a:latin typeface="Poppins"/>
               </a:rPr>
               <a:t>Real-time inventory check prevents overselling</a:t>
+            </a:r>
+          </a:p>
+        </p:txBody>
+      </p:sp>
+      <p:sp>
+        <p:nvSpPr>
+          <p:cNvPr id="57" name="TextBox 56">
+            <a:extLst>
+              <a:ext uri="{FF2B5EF4-FFF2-40B4-BE49-F238E27FC236}">
+                <a16:creationId xmlns:a16="http://schemas.microsoft.com/office/drawing/2014/main" id="{FB2C7DE4-1A00-42B5-8081-E70FDE6D619C}"/>
+              </a:ext>
+            </a:extLst>
+          </p:cNvPr>
+          <p:cNvSpPr txBox="1"/>
+          <p:nvPr/>
+        </p:nvSpPr>
+        <p:spPr>
+          <a:xfrm>
+            <a:off x="11630025" y="153975"/>
+            <a:ext cx="914400" cy="369332"/>
+          </a:xfrm>
+          <a:prstGeom prst="rect">
+            <a:avLst/>
+          </a:prstGeom>
+          <a:solidFill>
+            <a:schemeClr val="tx2">
+              <a:lumMod val="20000"/>
+              <a:lumOff val="80000"/>
+            </a:schemeClr>
+          </a:solidFill>
+        </p:spPr>
+        <p:txBody>
+          <a:bodyPr wrap="square" rtlCol="0">
+            <a:spAutoFit/>
+          </a:bodyPr>
+          <a:lstStyle/>
+          <a:p>
+            <a:r>
+              <a:rPr lang="en-US" dirty="0"/>
+              <a:t>4</a:t>
             </a:r>
           </a:p>
         </p:txBody>
@@ -14543,6 +14703,46 @@
           </a:prstGeom>
         </p:spPr>
       </p:pic>
+      <p:sp>
+        <p:nvSpPr>
+          <p:cNvPr id="66" name="TextBox 65">
+            <a:extLst>
+              <a:ext uri="{FF2B5EF4-FFF2-40B4-BE49-F238E27FC236}">
+                <a16:creationId xmlns:a16="http://schemas.microsoft.com/office/drawing/2014/main" id="{FEBBD72A-FD41-409C-8B22-AE17AE204760}"/>
+              </a:ext>
+            </a:extLst>
+          </p:cNvPr>
+          <p:cNvSpPr txBox="1"/>
+          <p:nvPr/>
+        </p:nvSpPr>
+        <p:spPr>
+          <a:xfrm>
+            <a:off x="11630025" y="153975"/>
+            <a:ext cx="914400" cy="369332"/>
+          </a:xfrm>
+          <a:prstGeom prst="rect">
+            <a:avLst/>
+          </a:prstGeom>
+          <a:solidFill>
+            <a:schemeClr val="tx2">
+              <a:lumMod val="20000"/>
+              <a:lumOff val="80000"/>
+            </a:schemeClr>
+          </a:solidFill>
+        </p:spPr>
+        <p:txBody>
+          <a:bodyPr wrap="square" rtlCol="0">
+            <a:spAutoFit/>
+          </a:bodyPr>
+          <a:lstStyle/>
+          <a:p>
+            <a:r>
+              <a:rPr lang="en-US" dirty="0"/>
+              <a:t>5</a:t>
+            </a:r>
+          </a:p>
+        </p:txBody>
+      </p:sp>
     </p:spTree>
   </p:cSld>
   <p:clrMapOvr>
@@ -16358,6 +16558,46 @@
           </a:p>
         </p:txBody>
       </p:sp>
+      <p:sp>
+        <p:nvSpPr>
+          <p:cNvPr id="49" name="TextBox 48">
+            <a:extLst>
+              <a:ext uri="{FF2B5EF4-FFF2-40B4-BE49-F238E27FC236}">
+                <a16:creationId xmlns:a16="http://schemas.microsoft.com/office/drawing/2014/main" id="{0CE36B4A-04CE-40F0-8D38-C84C70DF4D80}"/>
+              </a:ext>
+            </a:extLst>
+          </p:cNvPr>
+          <p:cNvSpPr txBox="1"/>
+          <p:nvPr/>
+        </p:nvSpPr>
+        <p:spPr>
+          <a:xfrm>
+            <a:off x="11630025" y="153975"/>
+            <a:ext cx="914400" cy="369332"/>
+          </a:xfrm>
+          <a:prstGeom prst="rect">
+            <a:avLst/>
+          </a:prstGeom>
+          <a:solidFill>
+            <a:schemeClr val="tx2">
+              <a:lumMod val="20000"/>
+              <a:lumOff val="80000"/>
+            </a:schemeClr>
+          </a:solidFill>
+        </p:spPr>
+        <p:txBody>
+          <a:bodyPr wrap="square" rtlCol="0">
+            <a:spAutoFit/>
+          </a:bodyPr>
+          <a:lstStyle/>
+          <a:p>
+            <a:r>
+              <a:rPr lang="en-US" dirty="0"/>
+              <a:t>6</a:t>
+            </a:r>
+          </a:p>
+        </p:txBody>
+      </p:sp>
     </p:spTree>
   </p:cSld>
   <p:clrMapOvr>
@@ -19395,6 +19635,46 @@
               </a:solidFill>
               <a:latin typeface="Poppins"/>
             </a:endParaRPr>
+          </a:p>
+        </p:txBody>
+      </p:sp>
+      <p:sp>
+        <p:nvSpPr>
+          <p:cNvPr id="71" name="TextBox 70">
+            <a:extLst>
+              <a:ext uri="{FF2B5EF4-FFF2-40B4-BE49-F238E27FC236}">
+                <a16:creationId xmlns:a16="http://schemas.microsoft.com/office/drawing/2014/main" id="{32179EAB-5F8C-4807-B480-CF2F7A62E2E6}"/>
+              </a:ext>
+            </a:extLst>
+          </p:cNvPr>
+          <p:cNvSpPr txBox="1"/>
+          <p:nvPr/>
+        </p:nvSpPr>
+        <p:spPr>
+          <a:xfrm>
+            <a:off x="11630025" y="153975"/>
+            <a:ext cx="914400" cy="369332"/>
+          </a:xfrm>
+          <a:prstGeom prst="rect">
+            <a:avLst/>
+          </a:prstGeom>
+          <a:solidFill>
+            <a:schemeClr val="tx2">
+              <a:lumMod val="20000"/>
+              <a:lumOff val="80000"/>
+            </a:schemeClr>
+          </a:solidFill>
+        </p:spPr>
+        <p:txBody>
+          <a:bodyPr wrap="square" rtlCol="0">
+            <a:spAutoFit/>
+          </a:bodyPr>
+          <a:lstStyle/>
+          <a:p>
+            <a:r>
+              <a:rPr lang="en-US" dirty="0"/>
+              <a:t>7</a:t>
+            </a:r>
           </a:p>
         </p:txBody>
       </p:sp>
